--- a/docs/demos/presentacion/ExamLab-Presentacion-Comercial-Administrada.pptx
+++ b/docs/demos/presentacion/ExamLab-Presentacion-Comercial-Administrada.pptx
@@ -10,6 +10,7 @@
     <p:sldId id="258" r:id="rId4"/>
     <p:sldId id="259" r:id="rId5"/>
     <p:sldId id="260" r:id="rId6"/>
+    <p:sldId id="262" r:id="rId13"/>
     <p:sldId id="261" r:id="rId7"/>
   </p:sldIdLst>
   <p:notesMasterIdLst>
@@ -5997,6 +5998,428 @@
 </p:sld>
 </file>
 
+<file path=ppt/slides/slide7.xml><?xml version="1.0" encoding="utf-8"?>
+<p:sld xmlns:a="http://schemas.openxmlformats.org/drawingml/2006/main" xmlns:p="http://schemas.openxmlformats.org/presentationml/2006/main" xmlns:r="http://schemas.openxmlformats.org/officeDocument/2006/relationships">
+  <p:cSld>
+    <p:bg>
+      <p:bgPr>
+        <a:solidFill>
+          <a:srgbClr val="FFFFFF"/>
+        </a:solidFill>
+        <a:effectLst/>
+      </p:bgPr>
+    </p:bg>
+    <p:spTree>
+      <p:nvGrpSpPr>
+        <p:cNvPr id="1" name=""/>
+        <p:cNvGrpSpPr/>
+        <p:nvPr/>
+      </p:nvGrpSpPr>
+      <p:grpSpPr/>
+      <p:sp>
+        <p:nvSpPr>
+          <p:cNvPr id="2" name="Rectangle 1"/>
+          <p:cNvSpPr/>
+          <p:nvPr/>
+        </p:nvSpPr>
+        <p:spPr>
+          <a:xfrm>
+            <a:off x="0" y="0"/>
+            <a:ext cx="12188952" cy="1234440"/>
+          </a:xfrm>
+          <a:prstGeom prst="rect">
+            <a:avLst/>
+          </a:prstGeom>
+          <a:solidFill>
+            <a:srgbClr val="7C3AED"/>
+          </a:solidFill>
+          <a:ln>
+            <a:noFill/>
+          </a:ln>
+        </p:spPr>
+        <p:style>
+          <a:lnRef idx="1">
+            <a:schemeClr val="accent1"/>
+          </a:lnRef>
+          <a:fillRef idx="3">
+            <a:schemeClr val="accent1"/>
+          </a:fillRef>
+          <a:effectRef idx="2">
+            <a:schemeClr val="accent1"/>
+          </a:effectRef>
+          <a:fontRef idx="minor">
+            <a:schemeClr val="lt1"/>
+          </a:fontRef>
+        </p:style>
+        <p:txBody>
+          <a:bodyPr rtlCol="0" anchor="ctr"/>
+          <a:lstStyle/>
+          <a:p>
+            <a:pPr algn="ctr"/>
+          </a:p>
+        </p:txBody>
+      </p:sp>
+      <p:sp>
+        <p:nvSpPr>
+          <p:cNvPr id="3" name="Rectangle 2"/>
+          <p:cNvSpPr/>
+          <p:nvPr/>
+        </p:nvSpPr>
+        <p:spPr>
+          <a:xfrm>
+            <a:off x="0" y="1234440"/>
+            <a:ext cx="12188952" cy="54864"/>
+          </a:xfrm>
+          <a:prstGeom prst="rect">
+            <a:avLst/>
+          </a:prstGeom>
+          <a:solidFill>
+            <a:srgbClr val="059669"/>
+          </a:solidFill>
+          <a:ln>
+            <a:noFill/>
+          </a:ln>
+        </p:spPr>
+        <p:style>
+          <a:lnRef idx="1">
+            <a:schemeClr val="accent1"/>
+          </a:lnRef>
+          <a:fillRef idx="3">
+            <a:schemeClr val="accent1"/>
+          </a:fillRef>
+          <a:effectRef idx="2">
+            <a:schemeClr val="accent1"/>
+          </a:effectRef>
+          <a:fontRef idx="minor">
+            <a:schemeClr val="lt1"/>
+          </a:fontRef>
+        </p:style>
+        <p:txBody>
+          <a:bodyPr rtlCol="0" anchor="ctr"/>
+          <a:lstStyle/>
+          <a:p>
+            <a:pPr algn="ctr"/>
+          </a:p>
+        </p:txBody>
+      </p:sp>
+      <p:sp>
+        <p:nvSpPr>
+          <p:cNvPr id="4" name="TextBox 3"/>
+          <p:cNvSpPr txBox="1"/>
+          <p:nvPr/>
+        </p:nvSpPr>
+        <p:spPr>
+          <a:xfrm>
+            <a:off x="548640" y="182880"/>
+            <a:ext cx="10515600" cy="274320"/>
+          </a:xfrm>
+          <a:prstGeom prst="rect">
+            <a:avLst/>
+          </a:prstGeom>
+          <a:noFill/>
+        </p:spPr>
+        <p:txBody>
+          <a:bodyPr wrap="square">
+            <a:spAutoFit/>
+          </a:bodyPr>
+          <a:lstStyle/>
+          <a:p>
+            <a:r>
+              <a:rPr sz="1100" b="1">
+                <a:solidFill>
+                  <a:srgbClr val="E9D5FF"/>
+                </a:solidFill>
+                <a:latin typeface="Calibri"/>
+              </a:rPr>
+              <a:t>MODELO DE IA</a:t>
+            </a:r>
+          </a:p>
+        </p:txBody>
+      </p:sp>
+      <p:sp>
+        <p:nvSpPr>
+          <p:cNvPr id="5" name="TextBox 4"/>
+          <p:cNvSpPr txBox="1"/>
+          <p:nvPr/>
+        </p:nvSpPr>
+        <p:spPr>
+          <a:xfrm>
+            <a:off x="548640" y="420624"/>
+            <a:ext cx="10972800" cy="502920"/>
+          </a:xfrm>
+          <a:prstGeom prst="rect">
+            <a:avLst/>
+          </a:prstGeom>
+          <a:noFill/>
+        </p:spPr>
+        <p:txBody>
+          <a:bodyPr wrap="square">
+            <a:spAutoFit/>
+          </a:bodyPr>
+          <a:lstStyle/>
+          <a:p>
+            <a:r>
+              <a:rPr sz="2400" b="1">
+                <a:solidFill>
+                  <a:srgbClr val="FFFFFF"/>
+                </a:solidFill>
+                <a:latin typeface="Calibri"/>
+              </a:rPr>
+              <a:t>Controlas el gasto de IA</a:t>
+            </a:r>
+          </a:p>
+        </p:txBody>
+      </p:sp>
+      <p:sp>
+        <p:nvSpPr>
+          <p:cNvPr id="6" name="TextBox 5"/>
+          <p:cNvSpPr txBox="1"/>
+          <p:nvPr/>
+        </p:nvSpPr>
+        <p:spPr>
+          <a:xfrm>
+            <a:off x="548640" y="914400"/>
+            <a:ext cx="10972800" cy="274320"/>
+          </a:xfrm>
+          <a:prstGeom prst="rect">
+            <a:avLst/>
+          </a:prstGeom>
+          <a:noFill/>
+        </p:spPr>
+        <p:txBody>
+          <a:bodyPr wrap="square">
+            <a:spAutoFit/>
+          </a:bodyPr>
+          <a:lstStyle/>
+          <a:p>
+            <a:r>
+              <a:rPr sz="1250" b="0">
+                <a:solidFill>
+                  <a:srgbClr val="E9D5FF"/>
+                </a:solidFill>
+                <a:latin typeface="Calibri"/>
+              </a:rPr>
+              <a:t>La IA viene incluida. Nosotros la operamos; tú controlas el gasto.</a:t>
+            </a:r>
+          </a:p>
+        </p:txBody>
+      </p:sp>
+      <p:sp>
+        <p:nvSpPr>
+          <p:cNvPr id="7" name="TextBox 6"/>
+          <p:cNvSpPr txBox="1"/>
+          <p:nvPr/>
+        </p:nvSpPr>
+        <p:spPr>
+          <a:xfrm>
+            <a:off x="640080" y="1645920"/>
+            <a:ext cx="10972800" cy="4572000"/>
+          </a:xfrm>
+          <a:prstGeom prst="rect">
+            <a:avLst/>
+          </a:prstGeom>
+          <a:noFill/>
+        </p:spPr>
+        <p:txBody>
+          <a:bodyPr wrap="square">
+            <a:spAutoFit/>
+          </a:bodyPr>
+          <a:lstStyle/>
+          <a:p>
+            <a:pPr>
+              <a:lnSpc>
+                <a:spcPct val="105000"/>
+              </a:lnSpc>
+              <a:spcAft>
+                <a:spcPts val="1200"/>
+              </a:spcAft>
+            </a:pPr>
+            <a:r>
+              <a:rPr sz="1500" b="1">
+                <a:solidFill>
+                  <a:srgbClr val="059669"/>
+                </a:solidFill>
+                <a:latin typeface="Calibri"/>
+              </a:rPr>
+              <a:t>✓  </a:t>
+            </a:r>
+            <a:r>
+              <a:rPr sz="1500" b="1">
+                <a:solidFill>
+                  <a:srgbClr val="1F2937"/>
+                </a:solidFill>
+                <a:latin typeface="Calibri"/>
+              </a:rPr>
+              <a:t>IA en todo</a:t>
+            </a:r>
+            <a:r>
+              <a:rPr sz="1500" b="0">
+                <a:solidFill>
+                  <a:srgbClr val="4B5563"/>
+                </a:solidFill>
+                <a:latin typeface="Calibri"/>
+              </a:rPr>
+              <a:t> — genera y califica exámenes, talleres y proyectos; tutor IA para estudiantes; asistente IA de plataforma; detección de copia.</a:t>
+            </a:r>
+          </a:p>
+          <a:p>
+            <a:pPr>
+              <a:lnSpc>
+                <a:spcPct val="105000"/>
+              </a:lnSpc>
+              <a:spcAft>
+                <a:spcPts val="1200"/>
+              </a:spcAft>
+            </a:pPr>
+            <a:r>
+              <a:rPr sz="1500" b="1">
+                <a:solidFill>
+                  <a:srgbClr val="059669"/>
+                </a:solidFill>
+                <a:latin typeface="Calibri"/>
+              </a:rPr>
+              <a:t>✓  </a:t>
+            </a:r>
+            <a:r>
+              <a:rPr sz="1500" b="1">
+                <a:solidFill>
+                  <a:srgbClr val="1F2937"/>
+                </a:solidFill>
+                <a:latin typeface="Calibri"/>
+              </a:rPr>
+              <a:t>Sin sorpresas de costo</a:t>
+            </a:r>
+            <a:r>
+              <a:rPr sz="1500" b="0">
+                <a:solidFill>
+                  <a:srgbClr val="4B5563"/>
+                </a:solidFill>
+                <a:latin typeface="Calibri"/>
+              </a:rPr>
+              <a:t> — usa tu propia API key (Gemini / OpenAI) sin sobrecosto, o inclúyela como add-on medido por consumo.</a:t>
+            </a:r>
+          </a:p>
+          <a:p>
+            <a:pPr>
+              <a:lnSpc>
+                <a:spcPct val="105000"/>
+              </a:lnSpc>
+              <a:spcAft>
+                <a:spcPts val="1200"/>
+              </a:spcAft>
+            </a:pPr>
+            <a:r>
+              <a:rPr sz="1500" b="1">
+                <a:solidFill>
+                  <a:srgbClr val="059669"/>
+                </a:solidFill>
+                <a:latin typeface="Calibri"/>
+              </a:rPr>
+              <a:t>✓  </a:t>
+            </a:r>
+            <a:r>
+              <a:rPr sz="1500" b="1">
+                <a:solidFill>
+                  <a:srgbClr val="1F2937"/>
+                </a:solidFill>
+                <a:latin typeface="Calibri"/>
+              </a:rPr>
+              <a:t>Cola de procesamiento IA</a:t>
+            </a:r>
+            <a:r>
+              <a:rPr sz="1500" b="0">
+                <a:solidFill>
+                  <a:srgbClr val="4B5563"/>
+                </a:solidFill>
+                <a:latin typeface="Calibri"/>
+              </a:rPr>
+              <a:t> — elige modo inmediato o en cola para controlar cuándo y cuánto corre la IA: gasto predecible, sin bloquear la plataforma.</a:t>
+            </a:r>
+          </a:p>
+          <a:p>
+            <a:pPr>
+              <a:lnSpc>
+                <a:spcPct val="105000"/>
+              </a:lnSpc>
+              <a:spcAft>
+                <a:spcPts val="1200"/>
+              </a:spcAft>
+            </a:pPr>
+            <a:r>
+              <a:rPr sz="1500" b="1">
+                <a:solidFill>
+                  <a:srgbClr val="059669"/>
+                </a:solidFill>
+                <a:latin typeface="Calibri"/>
+              </a:rPr>
+              <a:t>✓  </a:t>
+            </a:r>
+            <a:r>
+              <a:rPr sz="1500" b="1">
+                <a:solidFill>
+                  <a:srgbClr val="1F2937"/>
+                </a:solidFill>
+                <a:latin typeface="Calibri"/>
+              </a:rPr>
+              <a:t>Alta disponibilidad</a:t>
+            </a:r>
+            <a:r>
+              <a:rPr sz="1500" b="0">
+                <a:solidFill>
+                  <a:srgbClr val="4B5563"/>
+                </a:solidFill>
+                <a:latin typeface="Calibri"/>
+              </a:rPr>
+              <a:t> — claves de respaldo con failover automático: la IA no se cae si una clave agota su cuota.</a:t>
+            </a:r>
+          </a:p>
+          <a:p>
+            <a:pPr>
+              <a:lnSpc>
+                <a:spcPct val="105000"/>
+              </a:lnSpc>
+              <a:spcAft>
+                <a:spcPts val="1200"/>
+              </a:spcAft>
+            </a:pPr>
+            <a:r>
+              <a:rPr sz="1500" b="1">
+                <a:solidFill>
+                  <a:srgbClr val="059669"/>
+                </a:solidFill>
+                <a:latin typeface="Calibri"/>
+              </a:rPr>
+              <a:t>✓  </a:t>
+            </a:r>
+            <a:r>
+              <a:rPr sz="1500" b="1">
+                <a:solidFill>
+                  <a:srgbClr val="1F2937"/>
+                </a:solidFill>
+                <a:latin typeface="Calibri"/>
+              </a:rPr>
+              <a:t>Míralo en vivo</a:t>
+            </a:r>
+            <a:r>
+              <a:rPr sz="1500" b="0">
+                <a:solidFill>
+                  <a:srgbClr val="4B5563"/>
+                </a:solidFill>
+                <a:latin typeface="Calibri"/>
+              </a:rPr>
+              <a:t> — la generación y la calificación con IA se ven en los videos de demo por rol.</a:t>
+            </a:r>
+          </a:p>
+        </p:txBody>
+      </p:sp>
+    </p:spTree>
+  </p:cSld>
+  <p:clrMapOvr>
+    <a:masterClrMapping/>
+  </p:clrMapOvr>
+</p:sld>
+</file>
+
 <file path=ppt/theme/theme1.xml><?xml version="1.0" encoding="utf-8"?>
 <a:theme xmlns:a="http://schemas.openxmlformats.org/drawingml/2006/main" name="Office Theme">
   <a:themeElements>

--- a/docs/demos/presentacion/ExamLab-Presentacion-Comercial-Administrada.pptx
+++ b/docs/demos/presentacion/ExamLab-Presentacion-Comercial-Administrada.pptx
@@ -5799,6 +5799,444 @@
 </file>
 
 <file path=ppt/slides/slide6.xml><?xml version="1.0" encoding="utf-8"?>
+<p:sld xmlns:a="http://schemas.openxmlformats.org/drawingml/2006/main" xmlns:p="http://schemas.openxmlformats.org/presentationml/2006/main" xmlns:r="http://schemas.openxmlformats.org/officeDocument/2006/relationships">
+  <p:cSld>
+    <p:bg>
+      <p:bgPr>
+        <a:solidFill>
+          <a:srgbClr val="FFFFFF"/>
+        </a:solidFill>
+        <a:effectLst/>
+      </p:bgPr>
+    </p:bg>
+    <p:spTree>
+      <p:nvGrpSpPr>
+        <p:cNvPr id="1" name=""/>
+        <p:cNvGrpSpPr/>
+        <p:nvPr/>
+      </p:nvGrpSpPr>
+      <p:grpSpPr/>
+      <p:sp>
+        <p:nvSpPr>
+          <p:cNvPr id="2" name="Rectangle 1"/>
+          <p:cNvSpPr/>
+          <p:nvPr/>
+        </p:nvSpPr>
+        <p:spPr>
+          <a:xfrm>
+            <a:off x="0" y="0"/>
+            <a:ext cx="12188952" cy="1234440"/>
+          </a:xfrm>
+          <a:prstGeom prst="rect">
+            <a:avLst/>
+          </a:prstGeom>
+          <a:solidFill>
+            <a:srgbClr val="7C3AED"/>
+          </a:solidFill>
+          <a:ln>
+            <a:noFill/>
+          </a:ln>
+        </p:spPr>
+        <p:style>
+          <a:lnRef idx="1">
+            <a:schemeClr val="accent1"/>
+          </a:lnRef>
+          <a:fillRef idx="3">
+            <a:schemeClr val="accent1"/>
+          </a:fillRef>
+          <a:effectRef idx="2">
+            <a:schemeClr val="accent1"/>
+          </a:effectRef>
+          <a:fontRef idx="minor">
+            <a:schemeClr val="lt1"/>
+          </a:fontRef>
+        </p:style>
+        <p:txBody>
+          <a:bodyPr rtlCol="0" anchor="ctr"/>
+          <a:lstStyle/>
+          <a:p>
+            <a:pPr algn="ctr"/>
+          </a:p>
+        </p:txBody>
+      </p:sp>
+      <p:sp>
+        <p:nvSpPr>
+          <p:cNvPr id="3" name="Rectangle 2"/>
+          <p:cNvSpPr/>
+          <p:nvPr/>
+        </p:nvSpPr>
+        <p:spPr>
+          <a:xfrm>
+            <a:off x="0" y="1234440"/>
+            <a:ext cx="12188952" cy="54864"/>
+          </a:xfrm>
+          <a:prstGeom prst="rect">
+            <a:avLst/>
+          </a:prstGeom>
+          <a:solidFill>
+            <a:srgbClr val="059669"/>
+          </a:solidFill>
+          <a:ln>
+            <a:noFill/>
+          </a:ln>
+        </p:spPr>
+        <p:style>
+          <a:lnRef idx="1">
+            <a:schemeClr val="accent1"/>
+          </a:lnRef>
+          <a:fillRef idx="3">
+            <a:schemeClr val="accent1"/>
+          </a:fillRef>
+          <a:effectRef idx="2">
+            <a:schemeClr val="accent1"/>
+          </a:effectRef>
+          <a:fontRef idx="minor">
+            <a:schemeClr val="lt1"/>
+          </a:fontRef>
+        </p:style>
+        <p:txBody>
+          <a:bodyPr rtlCol="0" anchor="ctr"/>
+          <a:lstStyle/>
+          <a:p>
+            <a:pPr algn="ctr"/>
+          </a:p>
+        </p:txBody>
+      </p:sp>
+      <p:sp>
+        <p:nvSpPr>
+          <p:cNvPr id="4" name="TextBox 3"/>
+          <p:cNvSpPr txBox="1"/>
+          <p:nvPr/>
+        </p:nvSpPr>
+        <p:spPr>
+          <a:xfrm>
+            <a:off x="548640" y="182880"/>
+            <a:ext cx="10515600" cy="274320"/>
+          </a:xfrm>
+          <a:prstGeom prst="rect">
+            <a:avLst/>
+          </a:prstGeom>
+          <a:noFill/>
+        </p:spPr>
+        <p:txBody>
+          <a:bodyPr wrap="square">
+            <a:spAutoFit/>
+          </a:bodyPr>
+          <a:lstStyle/>
+          <a:p>
+            <a:r>
+              <a:rPr sz="1100" b="1">
+                <a:solidFill>
+                  <a:srgbClr val="E9D5FF"/>
+                </a:solidFill>
+                <a:latin typeface="Calibri"/>
+              </a:rPr>
+              <a:t>MODELO DE IA</a:t>
+            </a:r>
+          </a:p>
+        </p:txBody>
+      </p:sp>
+      <p:sp>
+        <p:nvSpPr>
+          <p:cNvPr id="5" name="TextBox 4"/>
+          <p:cNvSpPr txBox="1"/>
+          <p:nvPr/>
+        </p:nvSpPr>
+        <p:spPr>
+          <a:xfrm>
+            <a:off x="548640" y="420624"/>
+            <a:ext cx="10972800" cy="502920"/>
+          </a:xfrm>
+          <a:prstGeom prst="rect">
+            <a:avLst/>
+          </a:prstGeom>
+          <a:noFill/>
+        </p:spPr>
+        <p:txBody>
+          <a:bodyPr wrap="square">
+            <a:spAutoFit/>
+          </a:bodyPr>
+          <a:lstStyle/>
+          <a:p>
+            <a:r>
+              <a:rPr sz="2400" b="1">
+                <a:solidFill>
+                  <a:srgbClr val="FFFFFF"/>
+                </a:solidFill>
+                <a:latin typeface="Calibri"/>
+              </a:rPr>
+              <a:t>Controlas el gasto de IA</a:t>
+            </a:r>
+          </a:p>
+        </p:txBody>
+      </p:sp>
+      <p:sp>
+        <p:nvSpPr>
+          <p:cNvPr id="6" name="TextBox 5"/>
+          <p:cNvSpPr txBox="1"/>
+          <p:nvPr/>
+        </p:nvSpPr>
+        <p:spPr>
+          <a:xfrm>
+            <a:off x="548640" y="914400"/>
+            <a:ext cx="10972800" cy="274320"/>
+          </a:xfrm>
+          <a:prstGeom prst="rect">
+            <a:avLst/>
+          </a:prstGeom>
+          <a:noFill/>
+        </p:spPr>
+        <p:txBody>
+          <a:bodyPr wrap="square">
+            <a:spAutoFit/>
+          </a:bodyPr>
+          <a:lstStyle/>
+          <a:p>
+            <a:r>
+              <a:rPr sz="1250" b="0">
+                <a:solidFill>
+                  <a:srgbClr val="E9D5FF"/>
+                </a:solidFill>
+                <a:latin typeface="Calibri"/>
+              </a:rPr>
+              <a:t>La IA viene incluida. Nosotros la operamos; tú controlas el gasto.</a:t>
+            </a:r>
+          </a:p>
+        </p:txBody>
+      </p:sp>
+      <p:sp>
+        <p:nvSpPr>
+          <p:cNvPr id="7" name="TextBox 6"/>
+          <p:cNvSpPr txBox="1"/>
+          <p:nvPr/>
+        </p:nvSpPr>
+        <p:spPr>
+          <a:xfrm>
+            <a:off x="640080" y="1645920"/>
+            <a:ext cx="10972800" cy="4572000"/>
+          </a:xfrm>
+          <a:prstGeom prst="rect">
+            <a:avLst/>
+          </a:prstGeom>
+          <a:noFill/>
+        </p:spPr>
+        <p:txBody>
+          <a:bodyPr wrap="square">
+            <a:spAutoFit/>
+          </a:bodyPr>
+          <a:lstStyle/>
+          <a:p>
+            <a:pPr>
+              <a:lnSpc>
+                <a:spcPct val="105000"/>
+              </a:lnSpc>
+              <a:spcAft>
+                <a:spcPts val="1200"/>
+              </a:spcAft>
+            </a:pPr>
+            <a:r>
+              <a:rPr sz="1500" b="1">
+                <a:solidFill>
+                  <a:srgbClr val="059669"/>
+                </a:solidFill>
+                <a:latin typeface="Calibri"/>
+              </a:rPr>
+              <a:t>✓  </a:t>
+            </a:r>
+            <a:r>
+              <a:rPr sz="1500" b="1">
+                <a:solidFill>
+                  <a:srgbClr val="1F2937"/>
+                </a:solidFill>
+                <a:latin typeface="Calibri"/>
+              </a:rPr>
+              <a:t>IA en todo</a:t>
+            </a:r>
+            <a:r>
+              <a:rPr sz="1500" b="0">
+                <a:solidFill>
+                  <a:srgbClr val="4B5563"/>
+                </a:solidFill>
+                <a:latin typeface="Calibri"/>
+              </a:rPr>
+              <a:t> — genera y califica exámenes, talleres y proyectos; tutor IA para estudiantes; asistente IA de plataforma; detección de copia.</a:t>
+            </a:r>
+          </a:p>
+          <a:p>
+            <a:pPr>
+              <a:lnSpc>
+                <a:spcPct val="105000"/>
+              </a:lnSpc>
+              <a:spcAft>
+                <a:spcPts val="1200"/>
+              </a:spcAft>
+            </a:pPr>
+            <a:r>
+              <a:rPr sz="1500" b="1">
+                <a:solidFill>
+                  <a:srgbClr val="059669"/>
+                </a:solidFill>
+                <a:latin typeface="Calibri"/>
+              </a:rPr>
+              <a:t>✓  </a:t>
+            </a:r>
+            <a:r>
+              <a:rPr sz="1500" b="1">
+                <a:solidFill>
+                  <a:srgbClr val="1F2937"/>
+                </a:solidFill>
+                <a:latin typeface="Calibri"/>
+              </a:rPr>
+              <a:t>Sin sorpresas de costo</a:t>
+            </a:r>
+            <a:r>
+              <a:rPr sz="1500" b="0">
+                <a:solidFill>
+                  <a:srgbClr val="4B5563"/>
+                </a:solidFill>
+                <a:latin typeface="Calibri"/>
+              </a:rPr>
+              <a:t> — usa tu propia API key (Gemini / OpenAI) sin sobrecosto, o inclúyela como add-on medido por consumo.</a:t>
+            </a:r>
+          </a:p>
+          <a:p>
+            <a:pPr>
+              <a:lnSpc>
+                <a:spcPct val="105000"/>
+              </a:lnSpc>
+              <a:spcAft>
+                <a:spcPts val="1200"/>
+              </a:spcAft>
+            </a:pPr>
+            <a:r>
+              <a:rPr sz="1500" b="1">
+                <a:solidFill>
+                  <a:srgbClr val="059669"/>
+                </a:solidFill>
+                <a:latin typeface="Calibri"/>
+              </a:rPr>
+              <a:t>✓  </a:t>
+            </a:r>
+            <a:r>
+              <a:rPr sz="1500" b="1">
+                <a:solidFill>
+                  <a:srgbClr val="1F2937"/>
+                </a:solidFill>
+                <a:latin typeface="Calibri"/>
+              </a:rPr>
+              <a:t>Cola de procesamiento IA</a:t>
+            </a:r>
+            <a:r>
+              <a:rPr sz="1500" b="0">
+                <a:solidFill>
+                  <a:srgbClr val="4B5563"/>
+                </a:solidFill>
+                <a:latin typeface="Calibri"/>
+              </a:rPr>
+              <a:t> — elige modo inmediato o en cola para controlar cuándo y cuánto corre la IA: gasto predecible, sin bloquear la plataforma.</a:t>
+            </a:r>
+          </a:p>
+          <a:p>
+            <a:pPr>
+              <a:lnSpc>
+                <a:spcPct val="105000"/>
+              </a:lnSpc>
+              <a:spcAft>
+                <a:spcPts val="1200"/>
+              </a:spcAft>
+            </a:pPr>
+            <a:r>
+              <a:rPr sz="1500" b="1">
+                <a:solidFill>
+                  <a:srgbClr val="059669"/>
+                </a:solidFill>
+                <a:latin typeface="Calibri"/>
+              </a:rPr>
+              <a:t>✓  </a:t>
+            </a:r>
+            <a:r>
+              <a:rPr sz="1500" b="1">
+                <a:solidFill>
+                  <a:srgbClr val="1F2937"/>
+                </a:solidFill>
+                <a:latin typeface="Calibri"/>
+              </a:rPr>
+              <a:t>Alta disponibilidad</a:t>
+            </a:r>
+            <a:r>
+              <a:rPr sz="1500" b="0">
+                <a:solidFill>
+                  <a:srgbClr val="4B5563"/>
+                </a:solidFill>
+                <a:latin typeface="Calibri"/>
+              </a:rPr>
+              <a:t> — claves de respaldo con failover automático: la IA no se cae si una clave agota su cuota.</a:t>
+            </a:r>
+          </a:p>
+          <a:p>
+            <a:pPr>
+              <a:lnSpc>
+                <a:spcPct val="105000"/>
+              </a:lnSpc>
+              <a:spcAft>
+                <a:spcPts val="1200"/>
+              </a:spcAft>
+            </a:pPr>
+            <a:r>
+              <a:rPr sz="1500" b="1">
+                <a:solidFill>
+                  <a:srgbClr val="059669"/>
+                </a:solidFill>
+                <a:latin typeface="Calibri"/>
+              </a:rPr>
+              <a:t>✓  </a:t>
+            </a:r>
+            <a:r>
+              <a:rPr sz="1500" b="1">
+                <a:solidFill>
+                  <a:srgbClr val="1F2937"/>
+                </a:solidFill>
+                <a:latin typeface="Calibri"/>
+              </a:rPr>
+              <a:t>Míralo en vivo</a:t>
+            </a:r>
+            <a:r>
+              <a:rPr sz="1500" b="0">
+                <a:solidFill>
+                  <a:srgbClr val="4B5563"/>
+                </a:solidFill>
+                <a:latin typeface="Calibri"/>
+              </a:rPr>
+              <a:t> — la generación y la calificación con IA se ven en los videos de demo por rol.</a:t>
+            </a:r>
+          </a:p>
+          <a:p>
+            <a:pPr>
+              <a:spcBef>
+                <a:spcPts val="1400"/>
+              </a:spcBef>
+            </a:pPr>
+            <a:r>
+              <a:rPr sz="1350" b="1">
+                <a:solidFill>
+                  <a:srgbClr val="7C3AED"/>
+                </a:solidFill>
+                <a:latin typeface="Calibri"/>
+              </a:rPr>
+              <a:t>≈ US$0,06 por estudiante/mes con Gemini Flash  ·  almacenamiento incluido  ·  separación dedicada por institución para regulación</a:t>
+            </a:r>
+          </a:p>
+        </p:txBody>
+      </p:sp>
+    </p:spTree>
+  </p:cSld>
+  <p:clrMapOvr>
+    <a:masterClrMapping/>
+  </p:clrMapOvr>
+</p:sld>
+</file>
+
+<file path=ppt/slides/slide7.xml><?xml version="1.0" encoding="utf-8"?>
 <p:sld xmlns:a="http://schemas.openxmlformats.org/drawingml/2006/main" xmlns:r="http://schemas.openxmlformats.org/officeDocument/2006/relationships" xmlns:p="http://schemas.openxmlformats.org/presentationml/2006/main">
   <p:cSld name="Slide 6">
     <p:bg>
@@ -5987,428 +6425,6 @@
               <a:t>Solicita una propuesta a tu medida · ExamLab</a:t>
             </a:r>
             <a:endParaRPr lang="en-US" sz="1600" dirty="0"/>
-          </a:p>
-        </p:txBody>
-      </p:sp>
-    </p:spTree>
-  </p:cSld>
-  <p:clrMapOvr>
-    <a:masterClrMapping/>
-  </p:clrMapOvr>
-</p:sld>
-</file>
-
-<file path=ppt/slides/slide7.xml><?xml version="1.0" encoding="utf-8"?>
-<p:sld xmlns:a="http://schemas.openxmlformats.org/drawingml/2006/main" xmlns:p="http://schemas.openxmlformats.org/presentationml/2006/main" xmlns:r="http://schemas.openxmlformats.org/officeDocument/2006/relationships">
-  <p:cSld>
-    <p:bg>
-      <p:bgPr>
-        <a:solidFill>
-          <a:srgbClr val="FFFFFF"/>
-        </a:solidFill>
-        <a:effectLst/>
-      </p:bgPr>
-    </p:bg>
-    <p:spTree>
-      <p:nvGrpSpPr>
-        <p:cNvPr id="1" name=""/>
-        <p:cNvGrpSpPr/>
-        <p:nvPr/>
-      </p:nvGrpSpPr>
-      <p:grpSpPr/>
-      <p:sp>
-        <p:nvSpPr>
-          <p:cNvPr id="2" name="Rectangle 1"/>
-          <p:cNvSpPr/>
-          <p:nvPr/>
-        </p:nvSpPr>
-        <p:spPr>
-          <a:xfrm>
-            <a:off x="0" y="0"/>
-            <a:ext cx="12188952" cy="1234440"/>
-          </a:xfrm>
-          <a:prstGeom prst="rect">
-            <a:avLst/>
-          </a:prstGeom>
-          <a:solidFill>
-            <a:srgbClr val="7C3AED"/>
-          </a:solidFill>
-          <a:ln>
-            <a:noFill/>
-          </a:ln>
-        </p:spPr>
-        <p:style>
-          <a:lnRef idx="1">
-            <a:schemeClr val="accent1"/>
-          </a:lnRef>
-          <a:fillRef idx="3">
-            <a:schemeClr val="accent1"/>
-          </a:fillRef>
-          <a:effectRef idx="2">
-            <a:schemeClr val="accent1"/>
-          </a:effectRef>
-          <a:fontRef idx="minor">
-            <a:schemeClr val="lt1"/>
-          </a:fontRef>
-        </p:style>
-        <p:txBody>
-          <a:bodyPr rtlCol="0" anchor="ctr"/>
-          <a:lstStyle/>
-          <a:p>
-            <a:pPr algn="ctr"/>
-          </a:p>
-        </p:txBody>
-      </p:sp>
-      <p:sp>
-        <p:nvSpPr>
-          <p:cNvPr id="3" name="Rectangle 2"/>
-          <p:cNvSpPr/>
-          <p:nvPr/>
-        </p:nvSpPr>
-        <p:spPr>
-          <a:xfrm>
-            <a:off x="0" y="1234440"/>
-            <a:ext cx="12188952" cy="54864"/>
-          </a:xfrm>
-          <a:prstGeom prst="rect">
-            <a:avLst/>
-          </a:prstGeom>
-          <a:solidFill>
-            <a:srgbClr val="059669"/>
-          </a:solidFill>
-          <a:ln>
-            <a:noFill/>
-          </a:ln>
-        </p:spPr>
-        <p:style>
-          <a:lnRef idx="1">
-            <a:schemeClr val="accent1"/>
-          </a:lnRef>
-          <a:fillRef idx="3">
-            <a:schemeClr val="accent1"/>
-          </a:fillRef>
-          <a:effectRef idx="2">
-            <a:schemeClr val="accent1"/>
-          </a:effectRef>
-          <a:fontRef idx="minor">
-            <a:schemeClr val="lt1"/>
-          </a:fontRef>
-        </p:style>
-        <p:txBody>
-          <a:bodyPr rtlCol="0" anchor="ctr"/>
-          <a:lstStyle/>
-          <a:p>
-            <a:pPr algn="ctr"/>
-          </a:p>
-        </p:txBody>
-      </p:sp>
-      <p:sp>
-        <p:nvSpPr>
-          <p:cNvPr id="4" name="TextBox 3"/>
-          <p:cNvSpPr txBox="1"/>
-          <p:nvPr/>
-        </p:nvSpPr>
-        <p:spPr>
-          <a:xfrm>
-            <a:off x="548640" y="182880"/>
-            <a:ext cx="10515600" cy="274320"/>
-          </a:xfrm>
-          <a:prstGeom prst="rect">
-            <a:avLst/>
-          </a:prstGeom>
-          <a:noFill/>
-        </p:spPr>
-        <p:txBody>
-          <a:bodyPr wrap="square">
-            <a:spAutoFit/>
-          </a:bodyPr>
-          <a:lstStyle/>
-          <a:p>
-            <a:r>
-              <a:rPr sz="1100" b="1">
-                <a:solidFill>
-                  <a:srgbClr val="E9D5FF"/>
-                </a:solidFill>
-                <a:latin typeface="Calibri"/>
-              </a:rPr>
-              <a:t>MODELO DE IA</a:t>
-            </a:r>
-          </a:p>
-        </p:txBody>
-      </p:sp>
-      <p:sp>
-        <p:nvSpPr>
-          <p:cNvPr id="5" name="TextBox 4"/>
-          <p:cNvSpPr txBox="1"/>
-          <p:nvPr/>
-        </p:nvSpPr>
-        <p:spPr>
-          <a:xfrm>
-            <a:off x="548640" y="420624"/>
-            <a:ext cx="10972800" cy="502920"/>
-          </a:xfrm>
-          <a:prstGeom prst="rect">
-            <a:avLst/>
-          </a:prstGeom>
-          <a:noFill/>
-        </p:spPr>
-        <p:txBody>
-          <a:bodyPr wrap="square">
-            <a:spAutoFit/>
-          </a:bodyPr>
-          <a:lstStyle/>
-          <a:p>
-            <a:r>
-              <a:rPr sz="2400" b="1">
-                <a:solidFill>
-                  <a:srgbClr val="FFFFFF"/>
-                </a:solidFill>
-                <a:latin typeface="Calibri"/>
-              </a:rPr>
-              <a:t>Controlas el gasto de IA</a:t>
-            </a:r>
-          </a:p>
-        </p:txBody>
-      </p:sp>
-      <p:sp>
-        <p:nvSpPr>
-          <p:cNvPr id="6" name="TextBox 5"/>
-          <p:cNvSpPr txBox="1"/>
-          <p:nvPr/>
-        </p:nvSpPr>
-        <p:spPr>
-          <a:xfrm>
-            <a:off x="548640" y="914400"/>
-            <a:ext cx="10972800" cy="274320"/>
-          </a:xfrm>
-          <a:prstGeom prst="rect">
-            <a:avLst/>
-          </a:prstGeom>
-          <a:noFill/>
-        </p:spPr>
-        <p:txBody>
-          <a:bodyPr wrap="square">
-            <a:spAutoFit/>
-          </a:bodyPr>
-          <a:lstStyle/>
-          <a:p>
-            <a:r>
-              <a:rPr sz="1250" b="0">
-                <a:solidFill>
-                  <a:srgbClr val="E9D5FF"/>
-                </a:solidFill>
-                <a:latin typeface="Calibri"/>
-              </a:rPr>
-              <a:t>La IA viene incluida. Nosotros la operamos; tú controlas el gasto.</a:t>
-            </a:r>
-          </a:p>
-        </p:txBody>
-      </p:sp>
-      <p:sp>
-        <p:nvSpPr>
-          <p:cNvPr id="7" name="TextBox 6"/>
-          <p:cNvSpPr txBox="1"/>
-          <p:nvPr/>
-        </p:nvSpPr>
-        <p:spPr>
-          <a:xfrm>
-            <a:off x="640080" y="1645920"/>
-            <a:ext cx="10972800" cy="4572000"/>
-          </a:xfrm>
-          <a:prstGeom prst="rect">
-            <a:avLst/>
-          </a:prstGeom>
-          <a:noFill/>
-        </p:spPr>
-        <p:txBody>
-          <a:bodyPr wrap="square">
-            <a:spAutoFit/>
-          </a:bodyPr>
-          <a:lstStyle/>
-          <a:p>
-            <a:pPr>
-              <a:lnSpc>
-                <a:spcPct val="105000"/>
-              </a:lnSpc>
-              <a:spcAft>
-                <a:spcPts val="1200"/>
-              </a:spcAft>
-            </a:pPr>
-            <a:r>
-              <a:rPr sz="1500" b="1">
-                <a:solidFill>
-                  <a:srgbClr val="059669"/>
-                </a:solidFill>
-                <a:latin typeface="Calibri"/>
-              </a:rPr>
-              <a:t>✓  </a:t>
-            </a:r>
-            <a:r>
-              <a:rPr sz="1500" b="1">
-                <a:solidFill>
-                  <a:srgbClr val="1F2937"/>
-                </a:solidFill>
-                <a:latin typeface="Calibri"/>
-              </a:rPr>
-              <a:t>IA en todo</a:t>
-            </a:r>
-            <a:r>
-              <a:rPr sz="1500" b="0">
-                <a:solidFill>
-                  <a:srgbClr val="4B5563"/>
-                </a:solidFill>
-                <a:latin typeface="Calibri"/>
-              </a:rPr>
-              <a:t> — genera y califica exámenes, talleres y proyectos; tutor IA para estudiantes; asistente IA de plataforma; detección de copia.</a:t>
-            </a:r>
-          </a:p>
-          <a:p>
-            <a:pPr>
-              <a:lnSpc>
-                <a:spcPct val="105000"/>
-              </a:lnSpc>
-              <a:spcAft>
-                <a:spcPts val="1200"/>
-              </a:spcAft>
-            </a:pPr>
-            <a:r>
-              <a:rPr sz="1500" b="1">
-                <a:solidFill>
-                  <a:srgbClr val="059669"/>
-                </a:solidFill>
-                <a:latin typeface="Calibri"/>
-              </a:rPr>
-              <a:t>✓  </a:t>
-            </a:r>
-            <a:r>
-              <a:rPr sz="1500" b="1">
-                <a:solidFill>
-                  <a:srgbClr val="1F2937"/>
-                </a:solidFill>
-                <a:latin typeface="Calibri"/>
-              </a:rPr>
-              <a:t>Sin sorpresas de costo</a:t>
-            </a:r>
-            <a:r>
-              <a:rPr sz="1500" b="0">
-                <a:solidFill>
-                  <a:srgbClr val="4B5563"/>
-                </a:solidFill>
-                <a:latin typeface="Calibri"/>
-              </a:rPr>
-              <a:t> — usa tu propia API key (Gemini / OpenAI) sin sobrecosto, o inclúyela como add-on medido por consumo.</a:t>
-            </a:r>
-          </a:p>
-          <a:p>
-            <a:pPr>
-              <a:lnSpc>
-                <a:spcPct val="105000"/>
-              </a:lnSpc>
-              <a:spcAft>
-                <a:spcPts val="1200"/>
-              </a:spcAft>
-            </a:pPr>
-            <a:r>
-              <a:rPr sz="1500" b="1">
-                <a:solidFill>
-                  <a:srgbClr val="059669"/>
-                </a:solidFill>
-                <a:latin typeface="Calibri"/>
-              </a:rPr>
-              <a:t>✓  </a:t>
-            </a:r>
-            <a:r>
-              <a:rPr sz="1500" b="1">
-                <a:solidFill>
-                  <a:srgbClr val="1F2937"/>
-                </a:solidFill>
-                <a:latin typeface="Calibri"/>
-              </a:rPr>
-              <a:t>Cola de procesamiento IA</a:t>
-            </a:r>
-            <a:r>
-              <a:rPr sz="1500" b="0">
-                <a:solidFill>
-                  <a:srgbClr val="4B5563"/>
-                </a:solidFill>
-                <a:latin typeface="Calibri"/>
-              </a:rPr>
-              <a:t> — elige modo inmediato o en cola para controlar cuándo y cuánto corre la IA: gasto predecible, sin bloquear la plataforma.</a:t>
-            </a:r>
-          </a:p>
-          <a:p>
-            <a:pPr>
-              <a:lnSpc>
-                <a:spcPct val="105000"/>
-              </a:lnSpc>
-              <a:spcAft>
-                <a:spcPts val="1200"/>
-              </a:spcAft>
-            </a:pPr>
-            <a:r>
-              <a:rPr sz="1500" b="1">
-                <a:solidFill>
-                  <a:srgbClr val="059669"/>
-                </a:solidFill>
-                <a:latin typeface="Calibri"/>
-              </a:rPr>
-              <a:t>✓  </a:t>
-            </a:r>
-            <a:r>
-              <a:rPr sz="1500" b="1">
-                <a:solidFill>
-                  <a:srgbClr val="1F2937"/>
-                </a:solidFill>
-                <a:latin typeface="Calibri"/>
-              </a:rPr>
-              <a:t>Alta disponibilidad</a:t>
-            </a:r>
-            <a:r>
-              <a:rPr sz="1500" b="0">
-                <a:solidFill>
-                  <a:srgbClr val="4B5563"/>
-                </a:solidFill>
-                <a:latin typeface="Calibri"/>
-              </a:rPr>
-              <a:t> — claves de respaldo con failover automático: la IA no se cae si una clave agota su cuota.</a:t>
-            </a:r>
-          </a:p>
-          <a:p>
-            <a:pPr>
-              <a:lnSpc>
-                <a:spcPct val="105000"/>
-              </a:lnSpc>
-              <a:spcAft>
-                <a:spcPts val="1200"/>
-              </a:spcAft>
-            </a:pPr>
-            <a:r>
-              <a:rPr sz="1500" b="1">
-                <a:solidFill>
-                  <a:srgbClr val="059669"/>
-                </a:solidFill>
-                <a:latin typeface="Calibri"/>
-              </a:rPr>
-              <a:t>✓  </a:t>
-            </a:r>
-            <a:r>
-              <a:rPr sz="1500" b="1">
-                <a:solidFill>
-                  <a:srgbClr val="1F2937"/>
-                </a:solidFill>
-                <a:latin typeface="Calibri"/>
-              </a:rPr>
-              <a:t>Míralo en vivo</a:t>
-            </a:r>
-            <a:r>
-              <a:rPr sz="1500" b="0">
-                <a:solidFill>
-                  <a:srgbClr val="4B5563"/>
-                </a:solidFill>
-                <a:latin typeface="Calibri"/>
-              </a:rPr>
-              <a:t> — la generación y la calificación con IA se ven en los videos de demo por rol.</a:t>
-            </a:r>
           </a:p>
         </p:txBody>
       </p:sp>

--- a/docs/demos/presentacion/ExamLab-Presentacion-Comercial-Administrada.pptx
+++ b/docs/demos/presentacion/ExamLab-Presentacion-Comercial-Administrada.pptx
@@ -5322,7 +5322,7 @@
                   <a:srgbClr val="1E1B4B"/>
                 </a:solidFill>
               </a:rPr>
-              <a:t>Encuestas y Kahoot en vivo</a:t>
+              <a:t>Encuestas y Reto en vivo</a:t>
             </a:r>
             <a:endParaRPr lang="en-US" sz="1300" dirty="0"/>
           </a:p>
